--- a/week-07/presentations/ppts/day-03-outcome-vs-output-tracking.pptx
+++ b/week-07/presentations/ppts/day-03-outcome-vs-output-tracking.pptx
@@ -5805,6 +5805,27 @@
           <a:bodyPr/>
           <a:lstStyle/>
           <a:p>
+            <a:pPr lvl="0" indent="0">
+              <a:buNone/>
+            </a:pPr>
+            <a:r>
+              <a:rPr>
+                <a:latin typeface="Courier"/>
+              </a:rPr>
+              <a:t>## Monthly Outcome Review — &lt;feature&gt;
+### The primary outcome
+Baseline / Current / Target / Status (🟢/🟡/🔴)
+### Supporting outcomes
+[same table]
+### Counter-outcomes (the guardrails)
+[same table]
+### What we learned this month
+2–3 bullets — surprises, model changes
+### Decisions for next month
+3–5 specific decisions: invest more / pivot / stop</a:t>
+            </a:r>
+          </a:p>
+          <a:p>
             <a:pPr lvl="0" indent="0" marL="0">
               <a:buNone/>
             </a:pPr>
@@ -6170,6 +6191,45 @@
             <a:r>
               <a:rPr/>
               <a:t>📝 DP §3 Structure</a:t>
+            </a:r>
+          </a:p>
+        </p:txBody>
+      </p:sp>
+      <p:sp>
+        <p:nvSpPr>
+          <p:cNvPr id="3" name="Content Placeholder 2"/>
+          <p:cNvSpPr>
+            <a:spLocks noGrp="1"/>
+          </p:cNvSpPr>
+          <p:nvPr>
+            <p:ph idx="1"/>
+          </p:nvPr>
+        </p:nvSpPr>
+        <p:spPr/>
+        <p:txBody>
+          <a:bodyPr/>
+          <a:lstStyle/>
+          <a:p>
+            <a:pPr lvl="0" indent="0">
+              <a:buNone/>
+            </a:pPr>
+            <a:r>
+              <a:rPr>
+                <a:latin typeface="Courier"/>
+              </a:rPr>
+              <a:t>## 3. Tracking plan
+### Output / Outcome / Leading-Indicator triples
+[Activity 1 table]
+### Counter-metrics
+[from NS Defense Card]
+### Sprint-level tracking
+- Cadence; template link; dashboard link; thresholds
+### Monthly outcome review
+- Cadence; template link; author/audience
+### Quarterly NS roll-up
+- Cadence; template link
+### AI pattern detection
+- Prompt link; frequency; validation rule</a:t>
             </a:r>
           </a:p>
         </p:txBody>

--- a/week-07/presentations/ppts/day-03-outcome-vs-output-tracking.pptx
+++ b/week-07/presentations/ppts/day-03-outcome-vs-output-tracking.pptx
@@ -1201,7 +1201,7 @@
             </a:pPr>
             <a:r>
               <a:rPr/>
-              <a:t>All four cadences + AI in one §3.</a:t>
+              <a:t>All four cadences + AI in one Section 3.</a:t>
             </a:r>
           </a:p>
         </p:txBody>
@@ -1447,7 +1447,7 @@
             </a:pPr>
             <a:r>
               <a:rPr/>
-              <a:t>By 16:00, every triad has DP §3.</a:t>
+              <a:t>By 16:00, every triad has DP Section 3.</a:t>
             </a:r>
           </a:p>
         </p:txBody>
@@ -6115,7 +6115,7 @@
             </a:pPr>
             <a:r>
               <a:rPr/>
-              <a:t>Block 4 — §3 + AI Pattern Detection</a:t>
+              <a:t>Block 4 — Section 3 + AI Pattern Detection</a:t>
             </a:r>
           </a:p>
         </p:txBody>
@@ -6190,7 +6190,7 @@
             </a:pPr>
             <a:r>
               <a:rPr/>
-              <a:t>📝 DP §3 Structure</a:t>
+              <a:t>📝 DP Section 3 Structure</a:t>
             </a:r>
           </a:p>
         </p:txBody>
@@ -6276,7 +6276,7 @@
             </a:pPr>
             <a:r>
               <a:rPr/>
-              <a:t>🧿 AI Pattern Detection Prompt</a:t>
+              <a:t>🤖 AI Pattern Detection Prompt</a:t>
             </a:r>
           </a:p>
         </p:txBody>
@@ -6398,7 +6398,7 @@
             </a:pPr>
             <a:r>
               <a:rPr/>
-              <a:t>👥 Activity 4 — §3 + AI</a:t>
+              <a:t>👥 Activity 4 — Section 3 + AI</a:t>
             </a:r>
           </a:p>
         </p:txBody>
@@ -6435,7 +6435,7 @@
             </a:pPr>
             <a:r>
               <a:rPr/>
-              <a:t>15 min: combine into §3</a:t>
+              <a:t>15 min: combine into Section 3</a:t>
             </a:r>
           </a:p>
           <a:p>
@@ -6597,7 +6597,7 @@
             </a:pPr>
             <a:r>
               <a:rPr/>
-              <a:t>DP §3 drafted</a:t>
+              <a:t>DP Section 3 drafted</a:t>
             </a:r>
           </a:p>
           <a:p>
@@ -6642,7 +6642,7 @@
             </a:pPr>
             <a:r>
               <a:rPr/>
-              <a:t>Bring to Day 4: DP §§1–3. Tomorrow we map the flow.</a:t>
+              <a:t>Bring to Day 4: DP Sections 1–3. Tomorrow we map the flow.</a:t>
             </a:r>
           </a:p>
         </p:txBody>
@@ -6942,7 +6942,7 @@
             </a:pPr>
             <a:r>
               <a:rPr/>
-              <a:t>Pin DP §§1–2</a:t>
+              <a:t>Pin DP Sections 1–2</a:t>
             </a:r>
           </a:p>
           <a:p>
@@ -7050,7 +7050,7 @@
             </a:pPr>
             <a:r>
               <a:rPr/>
-              <a:t>Build §3 + AI pattern detection</a:t>
+              <a:t>Build Section 3 + AI pattern detection</a:t>
             </a:r>
           </a:p>
         </p:txBody>
@@ -7560,7 +7560,7 @@
             </a:pPr>
             <a:r>
               <a:rPr/>
-              <a:t>10 min: list 5–8 outputs from DP §2</a:t>
+              <a:t>10 min: list 5–8 outputs from DP Section 2</a:t>
             </a:r>
           </a:p>
           <a:p>

--- a/week-07/presentations/ppts/day-03-outcome-vs-output-tracking.pptx
+++ b/week-07/presentations/ppts/day-03-outcome-vs-output-tracking.pptx
@@ -5417,7 +5417,7 @@
             </a:pPr>
             <a:r>
               <a:rPr/>
-              <a:t>If a metric has no cadence, it has no audience.</a:t>
+              <a:t>If a metric has no cadence, it has no audience. The quarterly key performance indicator (KPI) roll-up is one such metric.</a:t>
             </a:r>
           </a:p>
         </p:txBody>
@@ -6281,6 +6281,31 @@
           </a:p>
         </p:txBody>
       </p:sp>
+      <p:sp>
+        <p:nvSpPr>
+          <p:cNvPr id="3" name="Content Placeholder 2"/>
+          <p:cNvSpPr>
+            <a:spLocks noGrp="1"/>
+          </p:cNvSpPr>
+          <p:nvPr>
+            <p:ph idx="1"/>
+          </p:nvPr>
+        </p:nvSpPr>
+        <p:spPr/>
+        <p:txBody>
+          <a:bodyPr/>
+          <a:lstStyle/>
+          <a:p>
+            <a:pPr lvl="0" indent="0" marL="0">
+              <a:buNone/>
+            </a:pPr>
+            <a:r>
+              <a:rPr/>
+              <a:t>Feed the prompt your Azure DevOps (ADO) query results.</a:t>
+            </a:r>
+          </a:p>
+        </p:txBody>
+      </p:sp>
     </p:spTree>
   </p:cSld>
 </p:sld>
@@ -6633,7 +6658,7 @@
             </a:pPr>
             <a:r>
               <a:rPr/>
-              <a:t>VSM canvas for the feature delivery</a:t>
+              <a:t>value stream mapping (VSM) canvas for the feature delivery</a:t>
             </a:r>
           </a:p>
           <a:p>
@@ -7476,7 +7501,7 @@
             </a:pPr>
             <a:r>
               <a:rPr/>
-              <a:t>Leading indicator = the early signal. Without it, you wait 30 days to learn the outcome failed.</a:t>
+              <a:t>Leading indicator = the early signal. Without it, you wait 30 days to learn the outcome failed. A dead-letter queue (DLQ) depth reading is one such early signal.</a:t>
             </a:r>
           </a:p>
         </p:txBody>
@@ -7560,7 +7585,7 @@
             </a:pPr>
             <a:r>
               <a:rPr/>
-              <a:t>10 min: list 5–8 outputs from DP Section 2</a:t>
+              <a:t>10 min: list 5–8 outputs from Delivery Plan (DP) Section 2</a:t>
             </a:r>
           </a:p>
           <a:p>

--- a/week-07/presentations/ppts/day-03-outcome-vs-output-tracking.pptx
+++ b/week-07/presentations/ppts/day-03-outcome-vs-output-tracking.pptx
@@ -6302,6 +6302,28 @@
             <a:r>
               <a:rPr/>
               <a:t>Feed the prompt your Azure DevOps (ADO) query results.</a:t>
+            </a:r>
+          </a:p>
+          <a:p>
+            <a:pPr lvl="0" indent="0">
+              <a:buNone/>
+            </a:pPr>
+            <a:r>
+              <a:rPr>
+                <a:latin typeface="Courier"/>
+              </a:rPr>
+              <a:t>Role: Senior PM doing pattern detection across a sprint.
+Context: &lt;ADO query results — items shipped, blocked,
+leading indicator readings&gt;
+Task: Identify top 3 patterns:
+1. Leading indicator moving wrong direction (or flat)
+2. Category over- or under-represented this sprint
+3. Anomaly worth investigating
+Constraints:
+- Use only provided data
+- Name specific items / numbers
+- Suggest one investigation step per pattern
+Format: 3 numbered — pattern / evidence / suggested investigation.</a:t>
             </a:r>
           </a:p>
         </p:txBody>

--- a/week-07/presentations/ppts/day-03-outcome-vs-output-tracking.pptx
+++ b/week-07/presentations/ppts/day-03-outcome-vs-output-tracking.pptx
@@ -873,7 +873,7 @@
             </a:pPr>
             <a:r>
               <a:rPr/>
-              <a:t>If a triad skips “decisions,” it’s a status meeting, not a review.</a:t>
+              <a:t>If a quad skips “decisions,” it’s a status meeting, not a review.</a:t>
             </a:r>
           </a:p>
         </p:txBody>
@@ -1447,7 +1447,7 @@
             </a:pPr>
             <a:r>
               <a:rPr/>
-              <a:t>By 16:00, every triad has DP Section 3.</a:t>
+              <a:t>By 16:00, every quad has DP Section 3.</a:t>
             </a:r>
           </a:p>
         </p:txBody>
@@ -5345,7 +5345,7 @@
             </a:pPr>
             <a:r>
               <a:rPr/>
-              <a:t>Triad + eng lead</a:t>
+              <a:t>Quad + eng lead</a:t>
             </a:r>
           </a:p>
           <a:p>
@@ -5399,7 +5399,7 @@
             </a:pPr>
             <a:r>
               <a:rPr/>
-              <a:t>Triad + leadership</a:t>
+              <a:t>Quad + leadership</a:t>
             </a:r>
           </a:p>
           <a:p>
@@ -5618,7 +5618,7 @@
             </a:pPr>
             <a:r>
               <a:rPr b="1"/>
-              <a:t>Triads • 40 minutes</a:t>
+              <a:t>Quads • 40 minutes</a:t>
             </a:r>
           </a:p>
           <a:p>
@@ -6023,7 +6023,7 @@
             </a:pPr>
             <a:r>
               <a:rPr b="1"/>
-              <a:t>Triads • 40 minutes</a:t>
+              <a:t>Quads • 40 minutes</a:t>
             </a:r>
           </a:p>
           <a:p>
@@ -6473,7 +6473,7 @@
             </a:pPr>
             <a:r>
               <a:rPr b="1"/>
-              <a:t>Triads • 45 minutes • Wrap</a:t>
+              <a:t>Quads • 45 minutes • Wrap</a:t>
             </a:r>
           </a:p>
           <a:p>
@@ -6509,7 +6509,7 @@
             </a:pPr>
             <a:r>
               <a:rPr/>
-              <a:t>10 min: cross-review with another triad</a:t>
+              <a:t>10 min: cross-review with another quad</a:t>
             </a:r>
           </a:p>
           <a:p>
@@ -7598,7 +7598,7 @@
             </a:pPr>
             <a:r>
               <a:rPr b="1"/>
-              <a:t>Triads • 35 minutes</a:t>
+              <a:t>Quads • 35 minutes</a:t>
             </a:r>
           </a:p>
           <a:p>

--- a/week-07/presentations/ppts/day-03-outcome-vs-output-tracking.pptx
+++ b/week-07/presentations/ppts/day-03-outcome-vs-output-tracking.pptx
@@ -5618,7 +5618,7 @@
             </a:pPr>
             <a:r>
               <a:rPr b="1"/>
-              <a:t>Quads • 40 minutes</a:t>
+              <a:t>Quads • 50 minutes</a:t>
             </a:r>
           </a:p>
           <a:p>
@@ -6023,7 +6023,7 @@
             </a:pPr>
             <a:r>
               <a:rPr b="1"/>
-              <a:t>Quads • 40 minutes</a:t>
+              <a:t>Quads • 50 minutes</a:t>
             </a:r>
           </a:p>
           <a:p>
@@ -6473,7 +6473,7 @@
             </a:pPr>
             <a:r>
               <a:rPr b="1"/>
-              <a:t>Quads • 45 minutes • Wrap</a:t>
+              <a:t>Quads • 55 minutes • Wrap</a:t>
             </a:r>
           </a:p>
           <a:p>
@@ -7598,7 +7598,7 @@
             </a:pPr>
             <a:r>
               <a:rPr b="1"/>
-              <a:t>Quads • 35 minutes</a:t>
+              <a:t>Quads • 45 minutes</a:t>
             </a:r>
           </a:p>
           <a:p>

--- a/week-07/presentations/ppts/day-03-outcome-vs-output-tracking.pptx
+++ b/week-07/presentations/ppts/day-03-outcome-vs-output-tracking.pptx
@@ -5627,7 +5627,7 @@
             </a:pPr>
             <a:r>
               <a:rPr/>
-              <a:t>15 min: design sprint review template (6 sections)</a:t>
+              <a:t>25 min: design sprint review template (6 sections)</a:t>
             </a:r>
           </a:p>
           <a:p>
@@ -5663,7 +5663,7 @@
             </a:pPr>
             <a:r>
               <a:rPr/>
-              <a:t>⏱ 15 + 5 + 15 + 5</a:t>
+              <a:t>⏱ 25 + 5 + 15 + 5</a:t>
             </a:r>
           </a:p>
         </p:txBody>
@@ -6032,7 +6032,7 @@
             </a:pPr>
             <a:r>
               <a:rPr/>
-              <a:t>15 min: monthly review template</a:t>
+              <a:t>25 min: monthly review template</a:t>
             </a:r>
           </a:p>
           <a:p>
@@ -6068,7 +6068,7 @@
             </a:pPr>
             <a:r>
               <a:rPr/>
-              <a:t>⏱ 15 + 15 + 5 + 5</a:t>
+              <a:t>⏱ 25 + 15 + 5 + 5</a:t>
             </a:r>
           </a:p>
         </p:txBody>
@@ -6482,7 +6482,7 @@
             </a:pPr>
             <a:r>
               <a:rPr/>
-              <a:t>15 min: combine into Section 3</a:t>
+              <a:t>25 min: combine into Section 3</a:t>
             </a:r>
           </a:p>
           <a:p>
@@ -6518,7 +6518,7 @@
             </a:pPr>
             <a:r>
               <a:rPr/>
-              <a:t>⏱ 15 + 10 + 10 + 10 · 15-min wrap</a:t>
+              <a:t>⏱ 25 + 10 + 10 + 10 · 15-min wrap</a:t>
             </a:r>
           </a:p>
         </p:txBody>
@@ -7607,7 +7607,7 @@
             </a:pPr>
             <a:r>
               <a:rPr/>
-              <a:t>10 min: list 5–8 outputs from Delivery Plan (DP) Section 2</a:t>
+              <a:t>20 min: list 5–8 outputs from Delivery Plan (DP) Section 2</a:t>
             </a:r>
           </a:p>
           <a:p>
@@ -7643,7 +7643,7 @@
             </a:pPr>
             <a:r>
               <a:rPr/>
-              <a:t>⏱ 10 + 10 + 10 + 5</a:t>
+              <a:t>⏱ 20 + 10 + 10 + 5</a:t>
             </a:r>
           </a:p>
         </p:txBody>
